--- a/assets/pptx/catalog-578.pptx
+++ b/assets/pptx/catalog-578.pptx
@@ -3284,7 +3284,7 @@
                 <a:ea typeface="Ebrima"/>
                 <a:cs typeface="Ebrima"/>
               </a:rPr>
-              <a:t>ምን አለኝ ጌታዬ ሆይ (4x)</a:t>
+              <a:t>ምን አለኝ ጌታዬ ሆይ 4x</a:t>
             </a:r>
           </a:p>
           <a:p>
@@ -3338,7 +3338,7 @@
                 <a:ea typeface="Ebrima"/>
                 <a:cs typeface="Ebrima"/>
               </a:rPr>
-              <a:t>ምን አለኝ ጌታዬ ሆይ(6x)</a:t>
+              <a:t>ምን አለኝ ጌታዬ ሆይ6x</a:t>
             </a:r>
           </a:p>
         </p:txBody>
@@ -3423,7 +3423,7 @@
                 <a:ea typeface="Ebrima"/>
                 <a:cs typeface="Ebrima"/>
               </a:rPr>
-              <a:t>እጅህም ለእኔ ተዘርግቶልኛል (2x)</a:t>
+              <a:t>እጅህም ለእኔ ተዘርግቶልኛል 2x</a:t>
             </a:r>
           </a:p>
           <a:p>
@@ -3634,7 +3634,7 @@
                 <a:ea typeface="Ebrima"/>
                 <a:cs typeface="Ebrima"/>
               </a:rPr>
-              <a:t>ምን አለኝ ጌታዬ ሆይ (4x)</a:t>
+              <a:t>ምን አለኝ ጌታዬ ሆይ 4x</a:t>
             </a:r>
           </a:p>
         </p:txBody>
@@ -3719,7 +3719,7 @@
                 <a:ea typeface="Ebrima"/>
                 <a:cs typeface="Ebrima"/>
               </a:rPr>
-              <a:t>ድፍረት የሚሰጠኝ የፍቅር ፊትህ ነው (2x)</a:t>
+              <a:t>ድፍረት የሚሰጠኝ የፍቅር ፊትህ ነው 2x</a:t>
             </a:r>
           </a:p>
           <a:p>
@@ -3912,7 +3912,7 @@
                 <a:ea typeface="Ebrima"/>
                 <a:cs typeface="Ebrima"/>
               </a:rPr>
-              <a:t>ተባረክ ኢየሱስ ተባረክ (2x)</a:t>
+              <a:t>ተባረክ ኢየሱስ ተባረክ 2x</a:t>
             </a:r>
           </a:p>
         </p:txBody>
@@ -4311,7 +4311,7 @@
                 <a:ea typeface="Ebrima"/>
                 <a:cs typeface="Ebrima"/>
               </a:rPr>
-              <a:t>ተባረክ ኢየሱስ ተባረክ (5x)</a:t>
+              <a:t>ተባረክ ኢየሱስ ተባረክ 5x</a:t>
             </a:r>
           </a:p>
         </p:txBody>
